--- a/pptx/Fig2.pptx
+++ b/pptx/Fig2.pptx
@@ -243,7 +243,7 @@
           <a:p>
             <a:fld id="{AF9C1477-9631-4045-A375-7330E834B278}" type="datetimeFigureOut">
               <a:rPr lang="en-US" smtClean="0"/>
-              <a:t>9/10/2026</a:t>
+              <a:t>10/28/2026</a:t>
             </a:fld>
             <a:endParaRPr lang="en-US"/>
           </a:p>
@@ -413,7 +413,7 @@
           <a:p>
             <a:fld id="{AF9C1477-9631-4045-A375-7330E834B278}" type="datetimeFigureOut">
               <a:rPr lang="en-US" smtClean="0"/>
-              <a:t>9/10/2026</a:t>
+              <a:t>10/28/2026</a:t>
             </a:fld>
             <a:endParaRPr lang="en-US"/>
           </a:p>
@@ -593,7 +593,7 @@
           <a:p>
             <a:fld id="{AF9C1477-9631-4045-A375-7330E834B278}" type="datetimeFigureOut">
               <a:rPr lang="en-US" smtClean="0"/>
-              <a:t>9/10/2026</a:t>
+              <a:t>10/28/2026</a:t>
             </a:fld>
             <a:endParaRPr lang="en-US"/>
           </a:p>
@@ -763,7 +763,7 @@
           <a:p>
             <a:fld id="{AF9C1477-9631-4045-A375-7330E834B278}" type="datetimeFigureOut">
               <a:rPr lang="en-US" smtClean="0"/>
-              <a:t>9/10/2026</a:t>
+              <a:t>10/28/2026</a:t>
             </a:fld>
             <a:endParaRPr lang="en-US"/>
           </a:p>
@@ -1009,7 +1009,7 @@
           <a:p>
             <a:fld id="{AF9C1477-9631-4045-A375-7330E834B278}" type="datetimeFigureOut">
               <a:rPr lang="en-US" smtClean="0"/>
-              <a:t>9/10/2026</a:t>
+              <a:t>10/28/2026</a:t>
             </a:fld>
             <a:endParaRPr lang="en-US"/>
           </a:p>
@@ -1241,7 +1241,7 @@
           <a:p>
             <a:fld id="{AF9C1477-9631-4045-A375-7330E834B278}" type="datetimeFigureOut">
               <a:rPr lang="en-US" smtClean="0"/>
-              <a:t>9/10/2026</a:t>
+              <a:t>10/28/2026</a:t>
             </a:fld>
             <a:endParaRPr lang="en-US"/>
           </a:p>
@@ -1608,7 +1608,7 @@
           <a:p>
             <a:fld id="{AF9C1477-9631-4045-A375-7330E834B278}" type="datetimeFigureOut">
               <a:rPr lang="en-US" smtClean="0"/>
-              <a:t>9/10/2026</a:t>
+              <a:t>10/28/2026</a:t>
             </a:fld>
             <a:endParaRPr lang="en-US"/>
           </a:p>
@@ -1726,7 +1726,7 @@
           <a:p>
             <a:fld id="{AF9C1477-9631-4045-A375-7330E834B278}" type="datetimeFigureOut">
               <a:rPr lang="en-US" smtClean="0"/>
-              <a:t>9/10/2026</a:t>
+              <a:t>10/28/2026</a:t>
             </a:fld>
             <a:endParaRPr lang="en-US"/>
           </a:p>
@@ -1821,7 +1821,7 @@
           <a:p>
             <a:fld id="{AF9C1477-9631-4045-A375-7330E834B278}" type="datetimeFigureOut">
               <a:rPr lang="en-US" smtClean="0"/>
-              <a:t>9/10/2026</a:t>
+              <a:t>10/28/2026</a:t>
             </a:fld>
             <a:endParaRPr lang="en-US"/>
           </a:p>
@@ -2098,7 +2098,7 @@
           <a:p>
             <a:fld id="{AF9C1477-9631-4045-A375-7330E834B278}" type="datetimeFigureOut">
               <a:rPr lang="en-US" smtClean="0"/>
-              <a:t>9/10/2026</a:t>
+              <a:t>10/28/2026</a:t>
             </a:fld>
             <a:endParaRPr lang="en-US"/>
           </a:p>
@@ -2355,7 +2355,7 @@
           <a:p>
             <a:fld id="{AF9C1477-9631-4045-A375-7330E834B278}" type="datetimeFigureOut">
               <a:rPr lang="en-US" smtClean="0"/>
-              <a:t>9/10/2026</a:t>
+              <a:t>10/28/2026</a:t>
             </a:fld>
             <a:endParaRPr lang="en-US"/>
           </a:p>
@@ -2568,7 +2568,7 @@
           <a:p>
             <a:fld id="{AF9C1477-9631-4045-A375-7330E834B278}" type="datetimeFigureOut">
               <a:rPr lang="en-US" smtClean="0"/>
-              <a:t>9/10/2026</a:t>
+              <a:t>10/28/2026</a:t>
             </a:fld>
             <a:endParaRPr lang="en-US"/>
           </a:p>
@@ -2994,8 +2994,8 @@
         </p:blipFill>
         <p:spPr>
           <a:xfrm>
-            <a:off x="10559" y="229631"/>
-            <a:ext cx="10848071" cy="5617165"/>
+            <a:off x="10559" y="230165"/>
+            <a:ext cx="10848071" cy="5616096"/>
           </a:xfrm>
           <a:prstGeom prst="rect">
             <a:avLst/>
